--- a/decks/hist-tudors/hist-tudors_ch1_luther.pptx
+++ b/decks/hist-tudors/hist-tudors_ch1_luther.pptx
@@ -130,30 +130,30 @@
   <p:extLst>
     <p:ext uri="{521415D9-36F7-43E2-AB2F-B90AF26B5E84}">
       <p14:sectionLst xmlns:p14="http://schemas.microsoft.com/office/powerpoint/2010/main">
-        <p14:section name="Opening" id="{e744a40a-a822-d254-49b5-9e904b388799}">
+        <p14:section name="Opening" id="{db23f068-606a-4515-3f68-62ed7ac7764a}">
           <p14:sldIdLst>
             <p14:sldId id="256"/>
           </p14:sldIdLst>
         </p14:section>
-        <p14:section name="Gate" id="{0f23b0db-3c98-0760-0140-cef924f7c377}">
+        <p14:section name="Gate" id="{bfc74c91-17f9-064f-14a1-0d38336e442d}">
           <p14:sldIdLst>
             <p14:sldId id="257"/>
             <p14:sldId id="258"/>
           </p14:sldIdLst>
         </p14:section>
-        <p14:section name="Pre-teach" id="{6d58851e-b308-c76d-9193-6126e278b2fd}">
+        <p14:section name="Pre-teach" id="{211bea65-8791-a117-1121-11e78ba22b56}">
           <p14:sldIdLst>
             <p14:sldId id="259"/>
             <p14:sldId id="260"/>
           </p14:sldIdLst>
         </p14:section>
-        <p14:section name="Read-along" id="{29e79cfd-1bed-a210-887f-28b8b349740f}">
+        <p14:section name="Read-along" id="{4863c5fa-78e8-5b1c-8dec-942884266c9d}">
           <p14:sldIdLst>
             <p14:sldId id="261"/>
             <p14:sldId id="262"/>
           </p14:sldIdLst>
         </p14:section>
-        <p14:section name="Teach" id="{6ae43e79-a3df-1960-eb5f-4152c29254db}">
+        <p14:section name="Teach" id="{706e661e-498c-cf8f-504e-ecd49dab0b02}">
           <p14:sldIdLst>
             <p14:sldId id="263"/>
             <p14:sldId id="264"/>
@@ -163,7 +163,7 @@
             <p14:sldId id="268"/>
           </p14:sldIdLst>
         </p14:section>
-        <p14:section name="Routes" id="{5f423fea-683a-5ea4-b17c-ef4b7ee7adcc}">
+        <p14:section name="Routes" id="{5c194550-2fd4-75fa-9900-5c1957b526e0}">
           <p14:sldIdLst>
             <p14:sldId id="269"/>
             <p14:sldId id="270"/>
@@ -174,12 +174,12 @@
             <p14:sldId id="275"/>
           </p14:sldIdLst>
         </p14:section>
-        <p14:section name="Close" id="{3bd805f2-8bd5-b728-4983-ce5f628ee8d5}">
+        <p14:section name="Close" id="{f8517e36-3009-26ce-f77e-f37da77e6f19}">
           <p14:sldIdLst>
             <p14:sldId id="276"/>
           </p14:sldIdLst>
         </p14:section>
-        <p14:section name="Answers" id="{d4155eb0-08a3-beb2-9038-7b5b34307226}">
+        <p14:section name="Answers" id="{978896f1-ac8c-0ad4-a5bd-4e1d204197b2}">
           <p14:sldIdLst>
             <p14:sldId id="277"/>
             <p14:sldId id="278"/>
@@ -869,7 +869,7 @@
               <a:rPr lang="en-US" dirty="0"/>
               <a:t>Teach — What did Luther believe?. Say it in your own words, then check understanding with a quick question: ask a pupil from the pre-teach group first, since they met these words and ideas before the lesson. Pupils try to recall before you re-explain.
 Martin Luther was a German monk. In October 1517 he wrote the 95 Theses, a list of complaints against the Church. His biggest complaint was about indulgences: payments to the Church that were supposed to reduce the punishment for a person's sins. Luther said nobody could buy forgiveness.
-Luther believed that Christianity should be about what was written in the Bible. If something was not in the Bible, it had no place in Christianity. This was a direct challenge to the Pope, because many of the Pope's powers were not set out in the Bible. Luther also said that faith was personal: each person could read the Bible and understand it for themselves, so the Church did not need to tell them what to think.
+For Luther, Christianity rested on scripture and nothing else. If a practice could not be found in the Bible, he held that it had no business in the Church. This was a direct challenge to the Pope, because many of the Pope's powers were not set out in the Bible. Luther also said that faith was personal: each person could read the Bible and understand it for themselves, so the Church did not need to tell them what to think.
 To make this possible, Luther wanted the Bible printed in languages ordinary people spoke. Until then it was printed only in Latin. Luther translated it into German; your lesson dates his German Bible to 1525. When he was called to a hearing he refused to take back his words, and while hiding in a friend's castle he kept writing and translating.
 Tip: Three Luther ideas to remember: the Bible comes first; faith is personal; no paying for forgiveness.</a:t>
             </a:r>
@@ -5943,7 +5943,7 @@
                 <a:ea typeface="Calibri" pitchFamily="34" charset="-122"/>
                 <a:cs typeface="Calibri" pitchFamily="34" charset="-120"/>
               </a:rPr>
-              <a:t>Luther believed that Christianity should be about what was written in the Bible.</a:t>
+              <a:t>For Luther, Christianity rested on scripture and nothing else. If a practice could not be found in the Bible, he held that it had no business in the Church.</a:t>
             </a:r>
             <a:endParaRPr lang="en-US" sz="2400" dirty="0"/>
           </a:p>
